--- a/apresentacao/slides.pptx
+++ b/apresentacao/slides.pptx
@@ -12,8 +12,8 @@
     <p:sldId id="257" r:id="rId3"/>
     <p:sldId id="258" r:id="rId4"/>
     <p:sldId id="259" r:id="rId5"/>
-    <p:sldId id="261" r:id="rId7"/>
-    <p:sldId id="260" r:id="rId6"/>
+    <p:sldId id="261" r:id="rId6"/>
+    <p:sldId id="260" r:id="rId7"/>
     <p:sldId id="262" r:id="rId8"/>
     <p:sldId id="266" r:id="rId9"/>
     <p:sldId id="267" r:id="rId10"/>
@@ -118,6 +118,14 @@
     </p:ext>
   </p:extLst>
 </p:presentation>
+</file>
+
+<file path=ppt/revisionInfo.xml><?xml version="1.0" encoding="utf-8"?>
+<p1510:revInfo xmlns:a="http://schemas.openxmlformats.org/drawingml/2006/main" xmlns:r="http://schemas.openxmlformats.org/officeDocument/2006/relationships" xmlns:p1510="http://schemas.microsoft.com/office/powerpoint/2015/10/main">
+  <p1510:revLst>
+    <p1510:client id="{87862ED1-034A-061D-CD48-8E616F2D34BD}" v="18" dt="2026-06-23T00:59:10.827"/>
+  </p1510:revLst>
+</p1510:revInfo>
 </file>
 
 <file path=ppt/notesMasters/notesMaster1.xml><?xml version="1.0" encoding="utf-8"?>
@@ -646,7 +654,7 @@
           <a:p>
             <a:fld id="{F7021451-1387-4CA6-816F-3879F97B5CBC}" type="slidenum">
               <a:rPr lang="en-US"/>
-              <a:t>5</a:t>
+              <a:t>6</a:t>
             </a:fld>
             <a:endParaRPr lang="en-US"/>
           </a:p>
@@ -730,7 +738,7 @@
           <a:p>
             <a:fld id="{F7021451-1387-4CA6-816F-3879F97B5CBC}" type="slidenum">
               <a:rPr lang="en-US"/>
-              <a:t>6</a:t>
+              <a:t>5</a:t>
             </a:fld>
             <a:endParaRPr lang="en-US"/>
           </a:p>
@@ -3867,7 +3875,7 @@
         </p:nvSpPr>
         <p:spPr>
           <a:xfrm>
-            <a:off x="754380" y="2063750"/>
+            <a:off x="640080" y="2041979"/>
             <a:ext cx="2743200" cy="548640"/>
           </a:xfrm>
           <a:prstGeom prst="rect">
@@ -3977,7 +3985,7 @@
         </p:nvSpPr>
         <p:spPr>
           <a:xfrm>
-            <a:off x="3611880" y="2043430"/>
+            <a:off x="3383280" y="2043430"/>
             <a:ext cx="2743200" cy="548640"/>
           </a:xfrm>
           <a:prstGeom prst="rect">
@@ -4087,7 +4095,7 @@
         </p:nvSpPr>
         <p:spPr>
           <a:xfrm>
-            <a:off x="6629400" y="2043430"/>
+            <a:off x="6466114" y="2043430"/>
             <a:ext cx="2743200" cy="548640"/>
           </a:xfrm>
           <a:prstGeom prst="rect">
@@ -4166,6 +4174,477 @@
 </file>
 
 <file path=ppt/slides/slide5.xml><?xml version="1.0" encoding="utf-8"?>
+<p:sld xmlns:a="http://schemas.openxmlformats.org/drawingml/2006/main" xmlns:r="http://schemas.openxmlformats.org/officeDocument/2006/relationships" xmlns:p="http://schemas.openxmlformats.org/presentationml/2006/main">
+  <p:cSld name="Slide 6">
+    <p:bg>
+      <p:bgPr>
+        <a:solidFill>
+          <a:srgbClr val="FFFFFF"/>
+        </a:solidFill>
+        <a:effectLst/>
+      </p:bgPr>
+    </p:bg>
+    <p:spTree>
+      <p:nvGrpSpPr>
+        <p:cNvPr id="1" name=""/>
+        <p:cNvGrpSpPr/>
+        <p:nvPr/>
+      </p:nvGrpSpPr>
+      <p:grpSpPr>
+        <a:xfrm>
+          <a:off x="0" y="0"/>
+          <a:ext cx="0" cy="0"/>
+          <a:chOff x="0" y="0"/>
+          <a:chExt cx="0" cy="0"/>
+        </a:xfrm>
+      </p:grpSpPr>
+      <p:sp>
+        <p:nvSpPr>
+          <p:cNvPr id="2" name="Text 0"/>
+          <p:cNvSpPr/>
+          <p:nvPr/>
+        </p:nvSpPr>
+        <p:spPr>
+          <a:xfrm>
+            <a:off x="731520" y="365760"/>
+            <a:ext cx="10058400" cy="365760"/>
+          </a:xfrm>
+          <a:prstGeom prst="rect">
+            <a:avLst/>
+          </a:prstGeom>
+          <a:noFill/>
+          <a:ln/>
+        </p:spPr>
+        <p:txBody>
+          <a:bodyPr wrap="square" lIns="91440" tIns="45720" rIns="91440" bIns="45720" rtlCol="0" anchor="ctr"/>
+          <a:lstStyle/>
+          <a:p>
+            <a:pPr marL="0" indent="0">
+              <a:buNone/>
+            </a:pPr>
+            <a:r>
+              <a:rPr lang="en-US" sz="1100" b="1">
+                <a:solidFill>
+                  <a:srgbClr val="2A3622"/>
+                </a:solidFill>
+                <a:latin typeface="Sora" pitchFamily="34" charset="0"/>
+                <a:ea typeface="Sora"/>
+                <a:cs typeface="Sora" pitchFamily="34" charset="-120"/>
+              </a:rPr>
+              <a:t>4</a:t>
+            </a:r>
+            <a:r>
+              <a:rPr lang="en-US" sz="1100" b="1">
+                <a:solidFill>
+                  <a:srgbClr val="2A3622"/>
+                </a:solidFill>
+                <a:latin typeface="Sora"/>
+                <a:ea typeface="Sora"/>
+                <a:cs typeface="Sora" pitchFamily="34" charset="-120"/>
+              </a:rPr>
+              <a:t>. ENGENHARIA DE DADOS</a:t>
+            </a:r>
+            <a:endParaRPr lang="en-US" sz="1100">
+              <a:latin typeface="Sora"/>
+              <a:ea typeface="Sora"/>
+            </a:endParaRPr>
+          </a:p>
+        </p:txBody>
+      </p:sp>
+      <p:sp>
+        <p:nvSpPr>
+          <p:cNvPr id="3" name="Text 1"/>
+          <p:cNvSpPr/>
+          <p:nvPr/>
+        </p:nvSpPr>
+        <p:spPr>
+          <a:xfrm>
+            <a:off x="731520" y="731520"/>
+            <a:ext cx="10058400" cy="731520"/>
+          </a:xfrm>
+          <a:prstGeom prst="rect">
+            <a:avLst/>
+          </a:prstGeom>
+          <a:noFill/>
+          <a:ln/>
+        </p:spPr>
+        <p:txBody>
+          <a:bodyPr wrap="square" rtlCol="0" anchor="ctr"/>
+          <a:lstStyle/>
+          <a:p>
+            <a:pPr marL="0" indent="0">
+              <a:buNone/>
+            </a:pPr>
+            <a:r>
+              <a:rPr lang="en-US" sz="2800" b="1" dirty="0">
+                <a:solidFill>
+                  <a:srgbClr val="212D1B"/>
+                </a:solidFill>
+                <a:latin typeface="Sora" pitchFamily="34" charset="0"/>
+                <a:ea typeface="Sora" pitchFamily="34" charset="-122"/>
+                <a:cs typeface="Sora" pitchFamily="34" charset="-120"/>
+              </a:rPr>
+              <a:t>Modelagem Dimensional</a:t>
+            </a:r>
+            <a:endParaRPr lang="en-US" sz="2800" dirty="0"/>
+          </a:p>
+        </p:txBody>
+      </p:sp>
+      <p:sp>
+        <p:nvSpPr>
+          <p:cNvPr id="4" name="Shape 2"/>
+          <p:cNvSpPr/>
+          <p:nvPr/>
+        </p:nvSpPr>
+        <p:spPr>
+          <a:xfrm>
+            <a:off x="355600" y="1574800"/>
+            <a:ext cx="3840480" cy="3352800"/>
+          </a:xfrm>
+          <a:prstGeom prst="roundRect">
+            <a:avLst/>
+          </a:prstGeom>
+          <a:solidFill>
+            <a:srgbClr val="CDB183"/>
+          </a:solidFill>
+          <a:ln w="12700">
+            <a:solidFill>
+              <a:srgbClr val="E4E7E0"/>
+            </a:solidFill>
+            <a:prstDash val="solid"/>
+          </a:ln>
+        </p:spPr>
+        <p:txBody>
+          <a:bodyPr/>
+          <a:lstStyle/>
+          <a:p>
+            <a:endParaRPr lang="pt-BR"/>
+          </a:p>
+        </p:txBody>
+      </p:sp>
+      <p:sp>
+        <p:nvSpPr>
+          <p:cNvPr id="5" name="Text 3"/>
+          <p:cNvSpPr/>
+          <p:nvPr/>
+        </p:nvSpPr>
+        <p:spPr>
+          <a:xfrm>
+            <a:off x="1005840" y="1920240"/>
+            <a:ext cx="2590800" cy="457200"/>
+          </a:xfrm>
+          <a:prstGeom prst="rect">
+            <a:avLst/>
+          </a:prstGeom>
+          <a:noFill/>
+          <a:ln/>
+        </p:spPr>
+        <p:txBody>
+          <a:bodyPr wrap="square" rtlCol="0" anchor="ctr"/>
+          <a:lstStyle/>
+          <a:p>
+            <a:pPr marL="0" indent="0" algn="ctr">
+              <a:buNone/>
+            </a:pPr>
+            <a:r>
+              <a:rPr lang="en-US" sz="1800" b="1" dirty="0">
+                <a:solidFill>
+                  <a:srgbClr val="2A3622"/>
+                </a:solidFill>
+                <a:latin typeface="Sora" pitchFamily="34" charset="0"/>
+                <a:ea typeface="Sora" pitchFamily="34" charset="-122"/>
+                <a:cs typeface="Sora" pitchFamily="34" charset="-120"/>
+              </a:rPr>
+              <a:t>Tabela Fato Principal</a:t>
+            </a:r>
+            <a:endParaRPr lang="en-US" sz="1800" dirty="0"/>
+          </a:p>
+        </p:txBody>
+      </p:sp>
+      <p:sp>
+        <p:nvSpPr>
+          <p:cNvPr id="6" name="Text 4"/>
+          <p:cNvSpPr/>
+          <p:nvPr/>
+        </p:nvSpPr>
+        <p:spPr>
+          <a:xfrm>
+            <a:off x="914400" y="2560320"/>
+            <a:ext cx="2763520" cy="1790700"/>
+          </a:xfrm>
+          <a:prstGeom prst="rect">
+            <a:avLst/>
+          </a:prstGeom>
+          <a:noFill/>
+          <a:ln/>
+        </p:spPr>
+        <p:txBody>
+          <a:bodyPr wrap="square" rtlCol="0" anchor="ctr"/>
+          <a:lstStyle/>
+          <a:p>
+            <a:pPr marL="0" indent="0" algn="ctr">
+              <a:lnSpc>
+                <a:spcPts val="2200"/>
+              </a:lnSpc>
+              <a:buNone/>
+            </a:pPr>
+            <a:r>
+              <a:rPr lang="en-US" sz="1400" dirty="0">
+                <a:solidFill>
+                  <a:srgbClr val="4A5245"/>
+                </a:solidFill>
+                <a:latin typeface="Inter" pitchFamily="34" charset="0"/>
+                <a:ea typeface="Inter" pitchFamily="34" charset="-122"/>
+                <a:cs typeface="Inter" pitchFamily="34" charset="-120"/>
+              </a:rPr>
+              <a:t>Fato_Saude:</a:t>
+            </a:r>
+            <a:endParaRPr lang="en-US" sz="1400" dirty="0"/>
+          </a:p>
+          <a:p>
+            <a:pPr marL="0" indent="0" algn="ctr">
+              <a:lnSpc>
+                <a:spcPts val="2200"/>
+              </a:lnSpc>
+              <a:buNone/>
+            </a:pPr>
+            <a:r>
+              <a:rPr lang="en-US" sz="1400" dirty="0">
+                <a:solidFill>
+                  <a:srgbClr val="4A5245"/>
+                </a:solidFill>
+                <a:latin typeface="Inter" pitchFamily="34" charset="0"/>
+                <a:ea typeface="Inter" pitchFamily="34" charset="-122"/>
+                <a:cs typeface="Inter" pitchFamily="34" charset="-120"/>
+              </a:rPr>
+              <a:t>Centraliza os dados de cobertura quantitativa, armazenando as métricas de atendimento dos serviços de saúde e referenciando as chaves das dimensões.</a:t>
+            </a:r>
+            <a:endParaRPr lang="en-US" sz="1400" dirty="0"/>
+          </a:p>
+        </p:txBody>
+      </p:sp>
+      <p:sp>
+        <p:nvSpPr>
+          <p:cNvPr id="7" name="Shape 5"/>
+          <p:cNvSpPr/>
+          <p:nvPr/>
+        </p:nvSpPr>
+        <p:spPr>
+          <a:xfrm>
+            <a:off x="4846320" y="1574800"/>
+            <a:ext cx="3840480" cy="3352800"/>
+          </a:xfrm>
+          <a:prstGeom prst="roundRect">
+            <a:avLst/>
+          </a:prstGeom>
+          <a:solidFill>
+            <a:srgbClr val="CDB183"/>
+          </a:solidFill>
+          <a:ln w="12700">
+            <a:solidFill>
+              <a:srgbClr val="E4E7E0"/>
+            </a:solidFill>
+            <a:prstDash val="solid"/>
+          </a:ln>
+        </p:spPr>
+        <p:txBody>
+          <a:bodyPr/>
+          <a:lstStyle/>
+          <a:p>
+            <a:endParaRPr lang="pt-BR"/>
+          </a:p>
+        </p:txBody>
+      </p:sp>
+      <p:sp>
+        <p:nvSpPr>
+          <p:cNvPr id="8" name="Text 6"/>
+          <p:cNvSpPr/>
+          <p:nvPr/>
+        </p:nvSpPr>
+        <p:spPr>
+          <a:xfrm>
+            <a:off x="5156200" y="1920240"/>
+            <a:ext cx="3220720" cy="457200"/>
+          </a:xfrm>
+          <a:prstGeom prst="rect">
+            <a:avLst/>
+          </a:prstGeom>
+          <a:noFill/>
+          <a:ln/>
+        </p:spPr>
+        <p:txBody>
+          <a:bodyPr wrap="square" rtlCol="0" anchor="ctr"/>
+          <a:lstStyle/>
+          <a:p>
+            <a:pPr marL="0" indent="0" algn="ctr">
+              <a:buNone/>
+            </a:pPr>
+            <a:r>
+              <a:rPr lang="en-US" sz="1800" b="1" dirty="0">
+                <a:solidFill>
+                  <a:srgbClr val="2A3622"/>
+                </a:solidFill>
+                <a:latin typeface="Sora" pitchFamily="34" charset="0"/>
+                <a:ea typeface="Sora" pitchFamily="34" charset="-122"/>
+                <a:cs typeface="Sora" pitchFamily="34" charset="-120"/>
+              </a:rPr>
+              <a:t>Tabelas Dimensão (N:1)</a:t>
+            </a:r>
+            <a:endParaRPr lang="en-US" sz="1800" dirty="0"/>
+          </a:p>
+        </p:txBody>
+      </p:sp>
+      <p:sp>
+        <p:nvSpPr>
+          <p:cNvPr id="9" name="Text 7"/>
+          <p:cNvSpPr/>
+          <p:nvPr/>
+        </p:nvSpPr>
+        <p:spPr>
+          <a:xfrm>
+            <a:off x="4795520" y="2129790"/>
+            <a:ext cx="3992880" cy="2743200"/>
+          </a:xfrm>
+          <a:prstGeom prst="rect">
+            <a:avLst/>
+          </a:prstGeom>
+          <a:noFill/>
+          <a:ln/>
+        </p:spPr>
+        <p:txBody>
+          <a:bodyPr wrap="square" rtlCol="0" anchor="ctr"/>
+          <a:lstStyle/>
+          <a:p>
+            <a:pPr marL="0" indent="0" algn="ctr">
+              <a:lnSpc>
+                <a:spcPts val="2000"/>
+              </a:lnSpc>
+              <a:buNone/>
+            </a:pPr>
+            <a:r>
+              <a:rPr lang="en-US" sz="1400" dirty="0">
+                <a:solidFill>
+                  <a:srgbClr val="4A5245"/>
+                </a:solidFill>
+                <a:latin typeface="Inter" pitchFamily="34" charset="0"/>
+                <a:ea typeface="Inter" pitchFamily="34" charset="-122"/>
+                <a:cs typeface="Inter" pitchFamily="34" charset="-120"/>
+              </a:rPr>
+              <a:t>Dim_DSEI: Localização territorial e </a:t>
+            </a:r>
+            <a:r>
+              <a:rPr lang="en-US" sz="1400" dirty="0" err="1">
+                <a:solidFill>
+                  <a:srgbClr val="4A5245"/>
+                </a:solidFill>
+                <a:latin typeface="Inter" pitchFamily="34" charset="0"/>
+                <a:ea typeface="Inter" pitchFamily="34" charset="-122"/>
+                <a:cs typeface="Inter" pitchFamily="34" charset="-120"/>
+              </a:rPr>
+              <a:t>estados</a:t>
+            </a:r>
+            <a:r>
+              <a:rPr lang="en-US" sz="1400" dirty="0">
+                <a:solidFill>
+                  <a:srgbClr val="4A5245"/>
+                </a:solidFill>
+                <a:latin typeface="Inter" pitchFamily="34" charset="0"/>
+                <a:ea typeface="Inter" pitchFamily="34" charset="-122"/>
+                <a:cs typeface="Inter" pitchFamily="34" charset="-120"/>
+              </a:rPr>
+              <a:t>.</a:t>
+            </a:r>
+          </a:p>
+          <a:p>
+            <a:pPr marL="0" indent="0" algn="ctr">
+              <a:lnSpc>
+                <a:spcPts val="2000"/>
+              </a:lnSpc>
+              <a:buNone/>
+            </a:pPr>
+            <a:endParaRPr lang="en-US" sz="1400" dirty="0"/>
+          </a:p>
+          <a:p>
+            <a:pPr marL="0" indent="0" algn="ctr">
+              <a:lnSpc>
+                <a:spcPts val="2000"/>
+              </a:lnSpc>
+              <a:buNone/>
+            </a:pPr>
+            <a:r>
+              <a:rPr lang="en-US" sz="1400" dirty="0">
+                <a:solidFill>
+                  <a:srgbClr val="4A5245"/>
+                </a:solidFill>
+                <a:latin typeface="Inter" pitchFamily="34" charset="0"/>
+                <a:ea typeface="Inter" pitchFamily="34" charset="-122"/>
+                <a:cs typeface="Inter" pitchFamily="34" charset="-120"/>
+              </a:rPr>
+              <a:t>Dim_Tempo: Estrutura temporal para análises </a:t>
+            </a:r>
+            <a:r>
+              <a:rPr lang="en-US" sz="1400" dirty="0" err="1">
+                <a:solidFill>
+                  <a:srgbClr val="4A5245"/>
+                </a:solidFill>
+                <a:latin typeface="Inter" pitchFamily="34" charset="0"/>
+                <a:ea typeface="Inter" pitchFamily="34" charset="-122"/>
+                <a:cs typeface="Inter" pitchFamily="34" charset="-120"/>
+              </a:rPr>
+              <a:t>trimestrais</a:t>
+            </a:r>
+            <a:r>
+              <a:rPr lang="en-US" sz="1400" dirty="0">
+                <a:solidFill>
+                  <a:srgbClr val="4A5245"/>
+                </a:solidFill>
+                <a:latin typeface="Inter" pitchFamily="34" charset="0"/>
+                <a:ea typeface="Inter" pitchFamily="34" charset="-122"/>
+                <a:cs typeface="Inter" pitchFamily="34" charset="-120"/>
+              </a:rPr>
+              <a:t>.</a:t>
+            </a:r>
+          </a:p>
+          <a:p>
+            <a:pPr marL="0" indent="0" algn="ctr">
+              <a:lnSpc>
+                <a:spcPts val="2000"/>
+              </a:lnSpc>
+              <a:buNone/>
+            </a:pPr>
+            <a:endParaRPr lang="en-US" sz="1400" dirty="0"/>
+          </a:p>
+          <a:p>
+            <a:pPr marL="0" indent="0" algn="ctr">
+              <a:lnSpc>
+                <a:spcPts val="2000"/>
+              </a:lnSpc>
+              <a:buNone/>
+            </a:pPr>
+            <a:r>
+              <a:rPr lang="en-US" sz="1400" dirty="0">
+                <a:solidFill>
+                  <a:srgbClr val="4A5245"/>
+                </a:solidFill>
+                <a:latin typeface="Inter" pitchFamily="34" charset="0"/>
+                <a:ea typeface="Inter" pitchFamily="34" charset="-122"/>
+                <a:cs typeface="Inter" pitchFamily="34" charset="-120"/>
+              </a:rPr>
+              <a:t>Dim_Indicador: Categorização padronizada dos serviços assistenciais.</a:t>
+            </a:r>
+            <a:endParaRPr lang="en-US" sz="1400" dirty="0"/>
+          </a:p>
+        </p:txBody>
+      </p:sp>
+    </p:spTree>
+  </p:cSld>
+  <p:clrMapOvr>
+    <a:masterClrMapping/>
+  </p:clrMapOvr>
+</p:sld>
+</file>
+
+<file path=ppt/slides/slide6.xml><?xml version="1.0" encoding="utf-8"?>
 <p:sld xmlns:a="http://schemas.openxmlformats.org/drawingml/2006/main" xmlns:r="http://schemas.openxmlformats.org/officeDocument/2006/relationships" xmlns:p="http://schemas.openxmlformats.org/presentationml/2006/main">
   <p:cSld name="Slide 5">
     <p:bg>
@@ -4208,24 +4687,27 @@
           <a:ln/>
         </p:spPr>
         <p:txBody>
-          <a:bodyPr wrap="square" rtlCol="0" anchor="ctr"/>
+          <a:bodyPr wrap="square" lIns="91440" tIns="45720" rIns="91440" bIns="45720" rtlCol="0" anchor="ctr"/>
           <a:lstStyle/>
           <a:p>
             <a:pPr marL="0" indent="0">
               <a:buNone/>
             </a:pPr>
             <a:r>
-              <a:rPr lang="en-US" sz="1100" b="1" dirty="0">
+              <a:rPr lang="en-US" sz="1100" b="1">
                 <a:solidFill>
                   <a:srgbClr val="2A3622"/>
                 </a:solidFill>
-                <a:latin typeface="Sora" pitchFamily="34" charset="0"/>
-                <a:ea typeface="Sora" pitchFamily="34" charset="-122"/>
+                <a:latin typeface="Sora"/>
+                <a:ea typeface="Sora"/>
                 <a:cs typeface="Sora" pitchFamily="34" charset="-120"/>
               </a:rPr>
               <a:t>5. PLANEJAMENTO ESTRATÉGICO</a:t>
             </a:r>
-            <a:endParaRPr lang="en-US" sz="1100" dirty="0"/>
+            <a:endParaRPr lang="en-US" sz="1100">
+              <a:latin typeface="Sora"/>
+              <a:ea typeface="Sora"/>
+            </a:endParaRPr>
           </a:p>
         </p:txBody>
       </p:sp>
@@ -5552,463 +6034,6 @@
           </a:graphicData>
         </a:graphic>
       </p:graphicFrame>
-    </p:spTree>
-  </p:cSld>
-  <p:clrMapOvr>
-    <a:masterClrMapping/>
-  </p:clrMapOvr>
-</p:sld>
-</file>
-
-<file path=ppt/slides/slide6.xml><?xml version="1.0" encoding="utf-8"?>
-<p:sld xmlns:a="http://schemas.openxmlformats.org/drawingml/2006/main" xmlns:r="http://schemas.openxmlformats.org/officeDocument/2006/relationships" xmlns:p="http://schemas.openxmlformats.org/presentationml/2006/main">
-  <p:cSld name="Slide 6">
-    <p:bg>
-      <p:bgPr>
-        <a:solidFill>
-          <a:srgbClr val="FFFFFF"/>
-        </a:solidFill>
-        <a:effectLst/>
-      </p:bgPr>
-    </p:bg>
-    <p:spTree>
-      <p:nvGrpSpPr>
-        <p:cNvPr id="1" name=""/>
-        <p:cNvGrpSpPr/>
-        <p:nvPr/>
-      </p:nvGrpSpPr>
-      <p:grpSpPr>
-        <a:xfrm>
-          <a:off x="0" y="0"/>
-          <a:ext cx="0" cy="0"/>
-          <a:chOff x="0" y="0"/>
-          <a:chExt cx="0" cy="0"/>
-        </a:xfrm>
-      </p:grpSpPr>
-      <p:sp>
-        <p:nvSpPr>
-          <p:cNvPr id="2" name="Text 0"/>
-          <p:cNvSpPr/>
-          <p:nvPr/>
-        </p:nvSpPr>
-        <p:spPr>
-          <a:xfrm>
-            <a:off x="731520" y="365760"/>
-            <a:ext cx="10058400" cy="365760"/>
-          </a:xfrm>
-          <a:prstGeom prst="rect">
-            <a:avLst/>
-          </a:prstGeom>
-          <a:noFill/>
-          <a:ln/>
-        </p:spPr>
-        <p:txBody>
-          <a:bodyPr wrap="square" rtlCol="0" anchor="ctr"/>
-          <a:lstStyle/>
-          <a:p>
-            <a:pPr marL="0" indent="0">
-              <a:buNone/>
-            </a:pPr>
-            <a:r>
-              <a:rPr lang="en-US" sz="1100" b="1" dirty="0">
-                <a:solidFill>
-                  <a:srgbClr val="2A3622"/>
-                </a:solidFill>
-                <a:latin typeface="Sora" pitchFamily="34" charset="0"/>
-                <a:ea typeface="Sora" pitchFamily="34" charset="-122"/>
-                <a:cs typeface="Sora" pitchFamily="34" charset="-120"/>
-              </a:rPr>
-              <a:t>4. ENGENHARIA DE DADOS</a:t>
-            </a:r>
-            <a:endParaRPr lang="en-US" sz="1100" dirty="0"/>
-          </a:p>
-        </p:txBody>
-      </p:sp>
-      <p:sp>
-        <p:nvSpPr>
-          <p:cNvPr id="3" name="Text 1"/>
-          <p:cNvSpPr/>
-          <p:nvPr/>
-        </p:nvSpPr>
-        <p:spPr>
-          <a:xfrm>
-            <a:off x="731520" y="731520"/>
-            <a:ext cx="10058400" cy="731520"/>
-          </a:xfrm>
-          <a:prstGeom prst="rect">
-            <a:avLst/>
-          </a:prstGeom>
-          <a:noFill/>
-          <a:ln/>
-        </p:spPr>
-        <p:txBody>
-          <a:bodyPr wrap="square" rtlCol="0" anchor="ctr"/>
-          <a:lstStyle/>
-          <a:p>
-            <a:pPr marL="0" indent="0">
-              <a:buNone/>
-            </a:pPr>
-            <a:r>
-              <a:rPr lang="en-US" sz="2800" b="1" dirty="0">
-                <a:solidFill>
-                  <a:srgbClr val="212D1B"/>
-                </a:solidFill>
-                <a:latin typeface="Sora" pitchFamily="34" charset="0"/>
-                <a:ea typeface="Sora" pitchFamily="34" charset="-122"/>
-                <a:cs typeface="Sora" pitchFamily="34" charset="-120"/>
-              </a:rPr>
-              <a:t>Modelagem Dimensional</a:t>
-            </a:r>
-            <a:endParaRPr lang="en-US" sz="2800" dirty="0"/>
-          </a:p>
-        </p:txBody>
-      </p:sp>
-      <p:sp>
-        <p:nvSpPr>
-          <p:cNvPr id="4" name="Shape 2"/>
-          <p:cNvSpPr/>
-          <p:nvPr/>
-        </p:nvSpPr>
-        <p:spPr>
-          <a:xfrm>
-            <a:off x="355600" y="1574800"/>
-            <a:ext cx="3840480" cy="3352800"/>
-          </a:xfrm>
-          <a:prstGeom prst="roundRect">
-            <a:avLst/>
-          </a:prstGeom>
-          <a:solidFill>
-            <a:srgbClr val="CDB183"/>
-          </a:solidFill>
-          <a:ln w="12700">
-            <a:solidFill>
-              <a:srgbClr val="E4E7E0"/>
-            </a:solidFill>
-            <a:prstDash val="solid"/>
-          </a:ln>
-        </p:spPr>
-        <p:txBody>
-          <a:bodyPr/>
-          <a:lstStyle/>
-          <a:p>
-            <a:endParaRPr lang="pt-BR"/>
-          </a:p>
-        </p:txBody>
-      </p:sp>
-      <p:sp>
-        <p:nvSpPr>
-          <p:cNvPr id="5" name="Text 3"/>
-          <p:cNvSpPr/>
-          <p:nvPr/>
-        </p:nvSpPr>
-        <p:spPr>
-          <a:xfrm>
-            <a:off x="1005840" y="1920240"/>
-            <a:ext cx="2590800" cy="457200"/>
-          </a:xfrm>
-          <a:prstGeom prst="rect">
-            <a:avLst/>
-          </a:prstGeom>
-          <a:noFill/>
-          <a:ln/>
-        </p:spPr>
-        <p:txBody>
-          <a:bodyPr wrap="square" rtlCol="0" anchor="ctr"/>
-          <a:lstStyle/>
-          <a:p>
-            <a:pPr marL="0" indent="0" algn="ctr">
-              <a:buNone/>
-            </a:pPr>
-            <a:r>
-              <a:rPr lang="en-US" sz="1800" b="1" dirty="0">
-                <a:solidFill>
-                  <a:srgbClr val="2A3622"/>
-                </a:solidFill>
-                <a:latin typeface="Sora" pitchFamily="34" charset="0"/>
-                <a:ea typeface="Sora" pitchFamily="34" charset="-122"/>
-                <a:cs typeface="Sora" pitchFamily="34" charset="-120"/>
-              </a:rPr>
-              <a:t>Tabela Fato Principal</a:t>
-            </a:r>
-            <a:endParaRPr lang="en-US" sz="1800" dirty="0"/>
-          </a:p>
-        </p:txBody>
-      </p:sp>
-      <p:sp>
-        <p:nvSpPr>
-          <p:cNvPr id="6" name="Text 4"/>
-          <p:cNvSpPr/>
-          <p:nvPr/>
-        </p:nvSpPr>
-        <p:spPr>
-          <a:xfrm>
-            <a:off x="914400" y="2560320"/>
-            <a:ext cx="2763520" cy="1790700"/>
-          </a:xfrm>
-          <a:prstGeom prst="rect">
-            <a:avLst/>
-          </a:prstGeom>
-          <a:noFill/>
-          <a:ln/>
-        </p:spPr>
-        <p:txBody>
-          <a:bodyPr wrap="square" rtlCol="0" anchor="ctr"/>
-          <a:lstStyle/>
-          <a:p>
-            <a:pPr marL="0" indent="0" algn="ctr">
-              <a:lnSpc>
-                <a:spcPts val="2200"/>
-              </a:lnSpc>
-              <a:buNone/>
-            </a:pPr>
-            <a:r>
-              <a:rPr lang="en-US" sz="1400" dirty="0">
-                <a:solidFill>
-                  <a:srgbClr val="4A5245"/>
-                </a:solidFill>
-                <a:latin typeface="Inter" pitchFamily="34" charset="0"/>
-                <a:ea typeface="Inter" pitchFamily="34" charset="-122"/>
-                <a:cs typeface="Inter" pitchFamily="34" charset="-120"/>
-              </a:rPr>
-              <a:t>Fato_Saude:</a:t>
-            </a:r>
-            <a:endParaRPr lang="en-US" sz="1400" dirty="0"/>
-          </a:p>
-          <a:p>
-            <a:pPr marL="0" indent="0" algn="ctr">
-              <a:lnSpc>
-                <a:spcPts val="2200"/>
-              </a:lnSpc>
-              <a:buNone/>
-            </a:pPr>
-            <a:r>
-              <a:rPr lang="en-US" sz="1400" dirty="0">
-                <a:solidFill>
-                  <a:srgbClr val="4A5245"/>
-                </a:solidFill>
-                <a:latin typeface="Inter" pitchFamily="34" charset="0"/>
-                <a:ea typeface="Inter" pitchFamily="34" charset="-122"/>
-                <a:cs typeface="Inter" pitchFamily="34" charset="-120"/>
-              </a:rPr>
-              <a:t>Centraliza os dados de cobertura quantitativa, armazenando as métricas de atendimento dos serviços de saúde e referenciando as chaves das dimensões.</a:t>
-            </a:r>
-            <a:endParaRPr lang="en-US" sz="1400" dirty="0"/>
-          </a:p>
-        </p:txBody>
-      </p:sp>
-      <p:sp>
-        <p:nvSpPr>
-          <p:cNvPr id="7" name="Shape 5"/>
-          <p:cNvSpPr/>
-          <p:nvPr/>
-        </p:nvSpPr>
-        <p:spPr>
-          <a:xfrm>
-            <a:off x="4846320" y="1574800"/>
-            <a:ext cx="3840480" cy="3352800"/>
-          </a:xfrm>
-          <a:prstGeom prst="roundRect">
-            <a:avLst/>
-          </a:prstGeom>
-          <a:solidFill>
-            <a:srgbClr val="CDB183"/>
-          </a:solidFill>
-          <a:ln w="12700">
-            <a:solidFill>
-              <a:srgbClr val="E4E7E0"/>
-            </a:solidFill>
-            <a:prstDash val="solid"/>
-          </a:ln>
-        </p:spPr>
-        <p:txBody>
-          <a:bodyPr/>
-          <a:lstStyle/>
-          <a:p>
-            <a:endParaRPr lang="pt-BR"/>
-          </a:p>
-        </p:txBody>
-      </p:sp>
-      <p:sp>
-        <p:nvSpPr>
-          <p:cNvPr id="8" name="Text 6"/>
-          <p:cNvSpPr/>
-          <p:nvPr/>
-        </p:nvSpPr>
-        <p:spPr>
-          <a:xfrm>
-            <a:off x="5156200" y="1920240"/>
-            <a:ext cx="3220720" cy="457200"/>
-          </a:xfrm>
-          <a:prstGeom prst="rect">
-            <a:avLst/>
-          </a:prstGeom>
-          <a:noFill/>
-          <a:ln/>
-        </p:spPr>
-        <p:txBody>
-          <a:bodyPr wrap="square" rtlCol="0" anchor="ctr"/>
-          <a:lstStyle/>
-          <a:p>
-            <a:pPr marL="0" indent="0" algn="ctr">
-              <a:buNone/>
-            </a:pPr>
-            <a:r>
-              <a:rPr lang="en-US" sz="1800" b="1" dirty="0">
-                <a:solidFill>
-                  <a:srgbClr val="2A3622"/>
-                </a:solidFill>
-                <a:latin typeface="Sora" pitchFamily="34" charset="0"/>
-                <a:ea typeface="Sora" pitchFamily="34" charset="-122"/>
-                <a:cs typeface="Sora" pitchFamily="34" charset="-120"/>
-              </a:rPr>
-              <a:t>Tabelas Dimensão (N:1)</a:t>
-            </a:r>
-            <a:endParaRPr lang="en-US" sz="1800" dirty="0"/>
-          </a:p>
-        </p:txBody>
-      </p:sp>
-      <p:sp>
-        <p:nvSpPr>
-          <p:cNvPr id="9" name="Text 7"/>
-          <p:cNvSpPr/>
-          <p:nvPr/>
-        </p:nvSpPr>
-        <p:spPr>
-          <a:xfrm>
-            <a:off x="4795520" y="2129790"/>
-            <a:ext cx="3992880" cy="2743200"/>
-          </a:xfrm>
-          <a:prstGeom prst="rect">
-            <a:avLst/>
-          </a:prstGeom>
-          <a:noFill/>
-          <a:ln/>
-        </p:spPr>
-        <p:txBody>
-          <a:bodyPr wrap="square" rtlCol="0" anchor="ctr"/>
-          <a:lstStyle/>
-          <a:p>
-            <a:pPr marL="0" indent="0" algn="ctr">
-              <a:lnSpc>
-                <a:spcPts val="2000"/>
-              </a:lnSpc>
-              <a:buNone/>
-            </a:pPr>
-            <a:r>
-              <a:rPr lang="en-US" sz="1400" dirty="0">
-                <a:solidFill>
-                  <a:srgbClr val="4A5245"/>
-                </a:solidFill>
-                <a:latin typeface="Inter" pitchFamily="34" charset="0"/>
-                <a:ea typeface="Inter" pitchFamily="34" charset="-122"/>
-                <a:cs typeface="Inter" pitchFamily="34" charset="-120"/>
-              </a:rPr>
-              <a:t>Dim_DSEI: Localização territorial e </a:t>
-            </a:r>
-            <a:r>
-              <a:rPr lang="en-US" sz="1400" dirty="0" err="1">
-                <a:solidFill>
-                  <a:srgbClr val="4A5245"/>
-                </a:solidFill>
-                <a:latin typeface="Inter" pitchFamily="34" charset="0"/>
-                <a:ea typeface="Inter" pitchFamily="34" charset="-122"/>
-                <a:cs typeface="Inter" pitchFamily="34" charset="-120"/>
-              </a:rPr>
-              <a:t>estados</a:t>
-            </a:r>
-            <a:r>
-              <a:rPr lang="en-US" sz="1400" dirty="0">
-                <a:solidFill>
-                  <a:srgbClr val="4A5245"/>
-                </a:solidFill>
-                <a:latin typeface="Inter" pitchFamily="34" charset="0"/>
-                <a:ea typeface="Inter" pitchFamily="34" charset="-122"/>
-                <a:cs typeface="Inter" pitchFamily="34" charset="-120"/>
-              </a:rPr>
-              <a:t>.</a:t>
-            </a:r>
-          </a:p>
-          <a:p>
-            <a:pPr marL="0" indent="0" algn="ctr">
-              <a:lnSpc>
-                <a:spcPts val="2000"/>
-              </a:lnSpc>
-              <a:buNone/>
-            </a:pPr>
-            <a:endParaRPr lang="en-US" sz="1400" dirty="0"/>
-          </a:p>
-          <a:p>
-            <a:pPr marL="0" indent="0" algn="ctr">
-              <a:lnSpc>
-                <a:spcPts val="2000"/>
-              </a:lnSpc>
-              <a:buNone/>
-            </a:pPr>
-            <a:r>
-              <a:rPr lang="en-US" sz="1400" dirty="0">
-                <a:solidFill>
-                  <a:srgbClr val="4A5245"/>
-                </a:solidFill>
-                <a:latin typeface="Inter" pitchFamily="34" charset="0"/>
-                <a:ea typeface="Inter" pitchFamily="34" charset="-122"/>
-                <a:cs typeface="Inter" pitchFamily="34" charset="-120"/>
-              </a:rPr>
-              <a:t>Dim_Tempo: Estrutura temporal para análises </a:t>
-            </a:r>
-            <a:r>
-              <a:rPr lang="en-US" sz="1400" dirty="0" err="1">
-                <a:solidFill>
-                  <a:srgbClr val="4A5245"/>
-                </a:solidFill>
-                <a:latin typeface="Inter" pitchFamily="34" charset="0"/>
-                <a:ea typeface="Inter" pitchFamily="34" charset="-122"/>
-                <a:cs typeface="Inter" pitchFamily="34" charset="-120"/>
-              </a:rPr>
-              <a:t>trimestrais</a:t>
-            </a:r>
-            <a:r>
-              <a:rPr lang="en-US" sz="1400" dirty="0">
-                <a:solidFill>
-                  <a:srgbClr val="4A5245"/>
-                </a:solidFill>
-                <a:latin typeface="Inter" pitchFamily="34" charset="0"/>
-                <a:ea typeface="Inter" pitchFamily="34" charset="-122"/>
-                <a:cs typeface="Inter" pitchFamily="34" charset="-120"/>
-              </a:rPr>
-              <a:t>.</a:t>
-            </a:r>
-          </a:p>
-          <a:p>
-            <a:pPr marL="0" indent="0" algn="ctr">
-              <a:lnSpc>
-                <a:spcPts val="2000"/>
-              </a:lnSpc>
-              <a:buNone/>
-            </a:pPr>
-            <a:endParaRPr lang="en-US" sz="1400" dirty="0"/>
-          </a:p>
-          <a:p>
-            <a:pPr marL="0" indent="0" algn="ctr">
-              <a:lnSpc>
-                <a:spcPts val="2000"/>
-              </a:lnSpc>
-              <a:buNone/>
-            </a:pPr>
-            <a:r>
-              <a:rPr lang="en-US" sz="1400" dirty="0">
-                <a:solidFill>
-                  <a:srgbClr val="4A5245"/>
-                </a:solidFill>
-                <a:latin typeface="Inter" pitchFamily="34" charset="0"/>
-                <a:ea typeface="Inter" pitchFamily="34" charset="-122"/>
-                <a:cs typeface="Inter" pitchFamily="34" charset="-120"/>
-              </a:rPr>
-              <a:t>Dim_Indicador: Categorização padronizada dos serviços assistenciais.</a:t>
-            </a:r>
-            <a:endParaRPr lang="en-US" sz="1400" dirty="0"/>
-          </a:p>
-        </p:txBody>
-      </p:sp>
     </p:spTree>
   </p:cSld>
   <p:clrMapOvr>
